--- a/slides/Steve_Rozen_bioinformatics-on-ramp_2026_08_03.pptx
+++ b/slides/Steve_Rozen_bioinformatics-on-ramp_2026_08_03.pptx
@@ -383,7 +383,7 @@
             <a:pPr indent="0" algn="r">
               <a:buNone/>
             </a:pPr>
-            <a:fld id="{7425CC65-33E4-49E3-A042-302257D1F2FE}" type="slidenum">
+            <a:fld id="{7EB2A513-0285-4EC6-8ABE-A1056E486575}" type="slidenum">
               <a:rPr lang="en-US" sz="1400" b="0" u="none" strike="noStrike">
                 <a:solidFill>
                   <a:srgbClr val="000000"/>
@@ -550,7 +550,7 @@
                 <a:tab pos="0" algn="l"/>
               </a:tabLst>
             </a:pPr>
-            <a:fld id="{11380D74-4416-4072-8952-D78F2317FA6C}" type="slidenum">
+            <a:fld id="{A0D2C943-8347-43B5-AB88-AE2BB78A18BC}" type="slidenum">
               <a:rPr lang="en-US" sz="1200" b="0" u="none" strike="noStrike">
                 <a:solidFill>
                   <a:schemeClr val="dk1"/>
@@ -717,7 +717,7 @@
                 <a:tab pos="0" algn="l"/>
               </a:tabLst>
             </a:pPr>
-            <a:fld id="{7208A0F7-C370-494C-A34A-9D07E31B145F}" type="slidenum">
+            <a:fld id="{854E663E-5992-455F-BB97-5144B36F5D89}" type="slidenum">
               <a:rPr lang="en-US" sz="1200" b="0" u="none" strike="noStrike">
                 <a:solidFill>
                   <a:schemeClr val="dk1"/>
@@ -884,7 +884,7 @@
                 <a:tab pos="0" algn="l"/>
               </a:tabLst>
             </a:pPr>
-            <a:fld id="{5B914D6E-1E50-4819-A072-7B5AEB170640}" type="slidenum">
+            <a:fld id="{143FA633-0A8F-42FB-BFE5-15F7E19C6FB7}" type="slidenum">
               <a:rPr lang="en-US" sz="1200" b="0" u="none" strike="noStrike">
                 <a:solidFill>
                   <a:schemeClr val="dk1"/>
@@ -1051,7 +1051,7 @@
                 <a:tab pos="0" algn="l"/>
               </a:tabLst>
             </a:pPr>
-            <a:fld id="{6AFF46B2-E6B8-45F3-BAEA-0F7832EAF7AC}" type="slidenum">
+            <a:fld id="{AB8583C7-D368-4E4F-8F31-FAE7E93F916F}" type="slidenum">
               <a:rPr lang="en-US" sz="1200" b="0" u="none" strike="noStrike">
                 <a:solidFill>
                   <a:schemeClr val="dk1"/>
@@ -1218,7 +1218,7 @@
                 <a:tab pos="0" algn="l"/>
               </a:tabLst>
             </a:pPr>
-            <a:fld id="{C3BDE442-1C00-435B-89BC-B1144BD37628}" type="slidenum">
+            <a:fld id="{460B0D3D-E268-450B-8D86-F1F44CA40E16}" type="slidenum">
               <a:rPr lang="en-US" sz="1200" b="0" u="none" strike="noStrike">
                 <a:solidFill>
                   <a:schemeClr val="dk1"/>
@@ -1385,7 +1385,7 @@
                 <a:tab pos="0" algn="l"/>
               </a:tabLst>
             </a:pPr>
-            <a:fld id="{47ED6E35-B23D-4F87-948D-1245C73EC872}" type="slidenum">
+            <a:fld id="{CDA6240C-1F2F-47E5-8E5D-C496497C3E9C}" type="slidenum">
               <a:rPr lang="en-US" sz="1200" b="0" u="none" strike="noStrike">
                 <a:solidFill>
                   <a:schemeClr val="dk1"/>
@@ -3149,7 +3149,7 @@
         <p:spPr>
           <a:xfrm>
             <a:off x="685800" y="286560"/>
-            <a:ext cx="10743840" cy="6113880"/>
+            <a:ext cx="10743840" cy="3382200"/>
           </a:xfrm>
           <a:prstGeom prst="rect">
             <a:avLst/>
@@ -3225,7 +3225,7 @@
                 <a:uFillTx/>
                 <a:latin typeface="Arial"/>
               </a:rPr>
-              <a:t>Running an AI coding assistant / examples</a:t>
+              <a:t>Setting up and running an AI coding assistant / examples</a:t>
             </a:r>
             <a:endParaRPr lang="en-US" sz="1800" b="0" u="none" strike="noStrike">
               <a:solidFill>
